--- a/src/backend/bisheng/linsight/builtin_skills/bisheng-pptx/templates/classroom/template.pptx
+++ b/src/backend/bisheng/linsight/builtin_skills/bisheng-pptx/templates/classroom/template.pptx
@@ -2647,8 +2647,8 @@
         </p:nvSpPr>
         <p:spPr>
           <a:xfrm>
-            <a:off x="609600" y="6477000"/>
-            <a:ext cx="7112000" cy="177800"/>
+            <a:off x="609600" y="6273800"/>
+            <a:ext cx="7112000" cy="203200"/>
           </a:xfrm>
           <a:prstGeom prst="rect">
             <a:avLst/>
@@ -2667,7 +2667,7 @@
               </a:lnSpc>
             </a:pPr>
             <a:r>
-              <a:rPr sz="900" b="0">
+              <a:rPr sz="1000" b="0">
                 <a:solidFill>
                   <a:srgbClr val="5E6E64"/>
                 </a:solidFill>
@@ -2687,7 +2687,7 @@
         </p:nvSpPr>
         <p:spPr>
           <a:xfrm>
-            <a:off x="10820400" y="6451600"/>
+            <a:off x="10820400" y="6248400"/>
             <a:ext cx="762000" cy="203200"/>
           </a:xfrm>
           <a:prstGeom prst="rect">
@@ -2696,13 +2696,15 @@
           <a:noFill/>
         </p:spPr>
         <p:txBody>
-          <a:bodyPr wrap="none" lIns="0" rIns="0" tIns="0" bIns="0">
-            <a:spAutoFit/>
-          </a:bodyPr>
-          <a:lstStyle/>
-          <a:p>
-            <a:pPr algn="r"/>
-            <a:fld id="{8C3CBBAC-109E-411B-96B2-98EC9FEBEBF6}" type="slidenum">
+          <a:bodyPr wrap="square" lIns="0" rIns="0" tIns="0" bIns="0">
+            <a:noAutofit/>
+          </a:bodyPr>
+          <a:lstStyle/>
+          <a:p>
+            <a:pPr algn="r">
+              <a:defRPr sz="1000"/>
+            </a:pPr>
+            <a:fld id="{DDE99DBC-CD49-522D-91C3-A1C5582FCF46}" type="slidenum">
               <a:rPr lang="zh-CN" sz="1000">
                 <a:solidFill>
                   <a:srgbClr val="5E6E64"/>
@@ -3398,8 +3400,8 @@
         </p:nvSpPr>
         <p:spPr>
           <a:xfrm>
-            <a:off x="609600" y="6477000"/>
-            <a:ext cx="7112000" cy="177800"/>
+            <a:off x="609600" y="6273800"/>
+            <a:ext cx="7112000" cy="203200"/>
           </a:xfrm>
           <a:prstGeom prst="rect">
             <a:avLst/>
@@ -3418,7 +3420,7 @@
               </a:lnSpc>
             </a:pPr>
             <a:r>
-              <a:rPr sz="900" b="0">
+              <a:rPr sz="1000" b="0">
                 <a:solidFill>
                   <a:srgbClr val="5E6E64"/>
                 </a:solidFill>
@@ -3438,7 +3440,7 @@
         </p:nvSpPr>
         <p:spPr>
           <a:xfrm>
-            <a:off x="10820400" y="6451600"/>
+            <a:off x="10820400" y="6248400"/>
             <a:ext cx="762000" cy="203200"/>
           </a:xfrm>
           <a:prstGeom prst="rect">
@@ -3447,13 +3449,15 @@
           <a:noFill/>
         </p:spPr>
         <p:txBody>
-          <a:bodyPr wrap="none" lIns="0" rIns="0" tIns="0" bIns="0">
-            <a:spAutoFit/>
-          </a:bodyPr>
-          <a:lstStyle/>
-          <a:p>
-            <a:pPr algn="r"/>
-            <a:fld id="{25CE3BD4-D634-439F-9910-05257954D004}" type="slidenum">
+          <a:bodyPr wrap="square" lIns="0" rIns="0" tIns="0" bIns="0">
+            <a:noAutofit/>
+          </a:bodyPr>
+          <a:lstStyle/>
+          <a:p>
+            <a:pPr algn="r">
+              <a:defRPr sz="1000"/>
+            </a:pPr>
+            <a:fld id="{E9992F9C-8420-572C-A280-A262E2BAD14B}" type="slidenum">
               <a:rPr lang="zh-CN" sz="1000">
                 <a:solidFill>
                   <a:srgbClr val="5E6E64"/>
@@ -4550,8 +4554,8 @@
         </p:nvSpPr>
         <p:spPr>
           <a:xfrm>
-            <a:off x="609600" y="6477000"/>
-            <a:ext cx="7112000" cy="177800"/>
+            <a:off x="609600" y="6273800"/>
+            <a:ext cx="7112000" cy="203200"/>
           </a:xfrm>
           <a:prstGeom prst="rect">
             <a:avLst/>
@@ -4570,7 +4574,7 @@
               </a:lnSpc>
             </a:pPr>
             <a:r>
-              <a:rPr sz="900" b="0">
+              <a:rPr sz="1000" b="0">
                 <a:solidFill>
                   <a:srgbClr val="5E6E64"/>
                 </a:solidFill>
@@ -4590,7 +4594,7 @@
         </p:nvSpPr>
         <p:spPr>
           <a:xfrm>
-            <a:off x="10820400" y="6451600"/>
+            <a:off x="10820400" y="6248400"/>
             <a:ext cx="762000" cy="203200"/>
           </a:xfrm>
           <a:prstGeom prst="rect">
@@ -4599,13 +4603,15 @@
           <a:noFill/>
         </p:spPr>
         <p:txBody>
-          <a:bodyPr wrap="none" lIns="0" rIns="0" tIns="0" bIns="0">
-            <a:spAutoFit/>
-          </a:bodyPr>
-          <a:lstStyle/>
-          <a:p>
-            <a:pPr algn="r"/>
-            <a:fld id="{0AA865BC-978C-4D25-B334-4B90485AB3F9}" type="slidenum">
+          <a:bodyPr wrap="square" lIns="0" rIns="0" tIns="0" bIns="0">
+            <a:noAutofit/>
+          </a:bodyPr>
+          <a:lstStyle/>
+          <a:p>
+            <a:pPr algn="r">
+              <a:defRPr sz="1000"/>
+            </a:pPr>
+            <a:fld id="{F29BE658-C06A-574C-B146-37C9EEE0EAD4}" type="slidenum">
               <a:rPr lang="zh-CN" sz="1000">
                 <a:solidFill>
                   <a:srgbClr val="5E6E64"/>
@@ -5618,8 +5624,8 @@
         </p:nvSpPr>
         <p:spPr>
           <a:xfrm>
-            <a:off x="609600" y="6477000"/>
-            <a:ext cx="7112000" cy="177800"/>
+            <a:off x="609600" y="6273800"/>
+            <a:ext cx="7112000" cy="203200"/>
           </a:xfrm>
           <a:prstGeom prst="rect">
             <a:avLst/>
@@ -5638,7 +5644,7 @@
               </a:lnSpc>
             </a:pPr>
             <a:r>
-              <a:rPr sz="900" b="0">
+              <a:rPr sz="1000" b="0">
                 <a:solidFill>
                   <a:srgbClr val="5E6E64"/>
                 </a:solidFill>
@@ -5658,7 +5664,7 @@
         </p:nvSpPr>
         <p:spPr>
           <a:xfrm>
-            <a:off x="10820400" y="6451600"/>
+            <a:off x="10820400" y="6248400"/>
             <a:ext cx="762000" cy="203200"/>
           </a:xfrm>
           <a:prstGeom prst="rect">
@@ -5667,13 +5673,15 @@
           <a:noFill/>
         </p:spPr>
         <p:txBody>
-          <a:bodyPr wrap="none" lIns="0" rIns="0" tIns="0" bIns="0">
-            <a:spAutoFit/>
-          </a:bodyPr>
-          <a:lstStyle/>
-          <a:p>
-            <a:pPr algn="r"/>
-            <a:fld id="{65383263-E1C8-46BD-8B35-57D5CBCF419A}" type="slidenum">
+          <a:bodyPr wrap="square" lIns="0" rIns="0" tIns="0" bIns="0">
+            <a:noAutofit/>
+          </a:bodyPr>
+          <a:lstStyle/>
+          <a:p>
+            <a:pPr algn="r">
+              <a:defRPr sz="1000"/>
+            </a:pPr>
+            <a:fld id="{E2F9B20C-7F9B-563A-B2D6-7EDF2C9D5DB6}" type="slidenum">
               <a:rPr lang="zh-CN" sz="1000">
                 <a:solidFill>
                   <a:srgbClr val="5E6E64"/>
@@ -6603,8 +6611,8 @@
         </p:nvSpPr>
         <p:spPr>
           <a:xfrm>
-            <a:off x="609600" y="6477000"/>
-            <a:ext cx="7112000" cy="177800"/>
+            <a:off x="609600" y="6273800"/>
+            <a:ext cx="7112000" cy="203200"/>
           </a:xfrm>
           <a:prstGeom prst="rect">
             <a:avLst/>
@@ -6623,7 +6631,7 @@
               </a:lnSpc>
             </a:pPr>
             <a:r>
-              <a:rPr sz="900" b="0">
+              <a:rPr sz="1000" b="0">
                 <a:solidFill>
                   <a:srgbClr val="5E6E64"/>
                 </a:solidFill>
@@ -6643,7 +6651,7 @@
         </p:nvSpPr>
         <p:spPr>
           <a:xfrm>
-            <a:off x="10820400" y="6451600"/>
+            <a:off x="10820400" y="6248400"/>
             <a:ext cx="762000" cy="203200"/>
           </a:xfrm>
           <a:prstGeom prst="rect">
@@ -6652,13 +6660,15 @@
           <a:noFill/>
         </p:spPr>
         <p:txBody>
-          <a:bodyPr wrap="none" lIns="0" rIns="0" tIns="0" bIns="0">
-            <a:spAutoFit/>
-          </a:bodyPr>
-          <a:lstStyle/>
-          <a:p>
-            <a:pPr algn="r"/>
-            <a:fld id="{A831B76F-0C35-4568-B51B-8BE4E76E68AD}" type="slidenum">
+          <a:bodyPr wrap="square" lIns="0" rIns="0" tIns="0" bIns="0">
+            <a:noAutofit/>
+          </a:bodyPr>
+          <a:lstStyle/>
+          <a:p>
+            <a:pPr algn="r">
+              <a:defRPr sz="1000"/>
+            </a:pPr>
+            <a:fld id="{5D2F2DB6-E1F1-5A96-AAED-7D40C33FE5F3}" type="slidenum">
               <a:rPr lang="zh-CN" sz="1000">
                 <a:solidFill>
                   <a:srgbClr val="5E6E64"/>
@@ -7249,8 +7259,8 @@
         </p:nvSpPr>
         <p:spPr>
           <a:xfrm>
-            <a:off x="609600" y="6477000"/>
-            <a:ext cx="7112000" cy="177800"/>
+            <a:off x="609600" y="6273800"/>
+            <a:ext cx="7112000" cy="203200"/>
           </a:xfrm>
           <a:prstGeom prst="rect">
             <a:avLst/>
@@ -7269,7 +7279,7 @@
               </a:lnSpc>
             </a:pPr>
             <a:r>
-              <a:rPr sz="900" b="0">
+              <a:rPr sz="1000" b="0">
                 <a:solidFill>
                   <a:srgbClr val="5E6E64"/>
                 </a:solidFill>
@@ -7289,7 +7299,7 @@
         </p:nvSpPr>
         <p:spPr>
           <a:xfrm>
-            <a:off x="10820400" y="6451600"/>
+            <a:off x="10820400" y="6248400"/>
             <a:ext cx="762000" cy="203200"/>
           </a:xfrm>
           <a:prstGeom prst="rect">
@@ -7298,13 +7308,15 @@
           <a:noFill/>
         </p:spPr>
         <p:txBody>
-          <a:bodyPr wrap="none" lIns="0" rIns="0" tIns="0" bIns="0">
-            <a:spAutoFit/>
-          </a:bodyPr>
-          <a:lstStyle/>
-          <a:p>
-            <a:pPr algn="r"/>
-            <a:fld id="{E5A54B13-D6F3-43D5-9BF5-B3B29938A2C7}" type="slidenum">
+          <a:bodyPr wrap="square" lIns="0" rIns="0" tIns="0" bIns="0">
+            <a:noAutofit/>
+          </a:bodyPr>
+          <a:lstStyle/>
+          <a:p>
+            <a:pPr algn="r">
+              <a:defRPr sz="1000"/>
+            </a:pPr>
+            <a:fld id="{F5C2AFEB-ED3F-5ADC-9965-565CD064975D}" type="slidenum">
               <a:rPr lang="zh-CN" sz="1000">
                 <a:solidFill>
                   <a:srgbClr val="5E6E64"/>
@@ -7882,8 +7894,8 @@
         </p:nvSpPr>
         <p:spPr>
           <a:xfrm>
-            <a:off x="8382000" y="1143000"/>
-            <a:ext cx="4826000" cy="4826000"/>
+            <a:off x="7620000" y="1016000"/>
+            <a:ext cx="4318000" cy="4318000"/>
           </a:xfrm>
           <a:prstGeom prst="ellipse">
             <a:avLst/>
@@ -8767,8 +8779,8 @@
         </p:nvSpPr>
         <p:spPr>
           <a:xfrm>
-            <a:off x="609600" y="6477000"/>
-            <a:ext cx="7112000" cy="177800"/>
+            <a:off x="609600" y="6273800"/>
+            <a:ext cx="7112000" cy="203200"/>
           </a:xfrm>
           <a:prstGeom prst="rect">
             <a:avLst/>
@@ -8787,7 +8799,7 @@
               </a:lnSpc>
             </a:pPr>
             <a:r>
-              <a:rPr sz="900" b="0">
+              <a:rPr sz="1000" b="0">
                 <a:solidFill>
                   <a:srgbClr val="5E6E64"/>
                 </a:solidFill>
@@ -8807,7 +8819,7 @@
         </p:nvSpPr>
         <p:spPr>
           <a:xfrm>
-            <a:off x="10820400" y="6451600"/>
+            <a:off x="10820400" y="6248400"/>
             <a:ext cx="762000" cy="203200"/>
           </a:xfrm>
           <a:prstGeom prst="rect">
@@ -8816,13 +8828,15 @@
           <a:noFill/>
         </p:spPr>
         <p:txBody>
-          <a:bodyPr wrap="none" lIns="0" rIns="0" tIns="0" bIns="0">
-            <a:spAutoFit/>
-          </a:bodyPr>
-          <a:lstStyle/>
-          <a:p>
-            <a:pPr algn="r"/>
-            <a:fld id="{C2948E1D-B3F9-40F6-A08B-34EADB86A48C}" type="slidenum">
+          <a:bodyPr wrap="square" lIns="0" rIns="0" tIns="0" bIns="0">
+            <a:noAutofit/>
+          </a:bodyPr>
+          <a:lstStyle/>
+          <a:p>
+            <a:pPr algn="r">
+              <a:defRPr sz="1000"/>
+            </a:pPr>
+            <a:fld id="{0431B1DA-FC68-5EB0-AE69-C478E22073A4}" type="slidenum">
               <a:rPr lang="zh-CN" sz="1000">
                 <a:solidFill>
                   <a:srgbClr val="5E6E64"/>
@@ -8868,8 +8882,8 @@
         </p:nvSpPr>
         <p:spPr>
           <a:xfrm>
-            <a:off x="8382000" y="1143000"/>
-            <a:ext cx="4826000" cy="4826000"/>
+            <a:off x="7620000" y="1016000"/>
+            <a:ext cx="4318000" cy="4318000"/>
           </a:xfrm>
           <a:prstGeom prst="ellipse">
             <a:avLst/>
@@ -9030,8 +9044,8 @@
         </p:nvSpPr>
         <p:spPr>
           <a:xfrm>
-            <a:off x="609600" y="6477000"/>
-            <a:ext cx="7112000" cy="177800"/>
+            <a:off x="609600" y="6273800"/>
+            <a:ext cx="7112000" cy="203200"/>
           </a:xfrm>
           <a:prstGeom prst="rect">
             <a:avLst/>
@@ -9050,7 +9064,7 @@
               </a:lnSpc>
             </a:pPr>
             <a:r>
-              <a:rPr sz="900" b="0">
+              <a:rPr sz="1000" b="0">
                 <a:solidFill>
                   <a:srgbClr val="CFE3D6"/>
                 </a:solidFill>
@@ -9070,7 +9084,7 @@
         </p:nvSpPr>
         <p:spPr>
           <a:xfrm>
-            <a:off x="10820400" y="6451600"/>
+            <a:off x="10820400" y="6248400"/>
             <a:ext cx="762000" cy="203200"/>
           </a:xfrm>
           <a:prstGeom prst="rect">
@@ -9079,13 +9093,15 @@
           <a:noFill/>
         </p:spPr>
         <p:txBody>
-          <a:bodyPr wrap="none" lIns="0" rIns="0" tIns="0" bIns="0">
-            <a:spAutoFit/>
-          </a:bodyPr>
-          <a:lstStyle/>
-          <a:p>
-            <a:pPr algn="r"/>
-            <a:fld id="{F49E6B00-139A-457E-8B92-59BE912DF5B0}" type="slidenum">
+          <a:bodyPr wrap="square" lIns="0" rIns="0" tIns="0" bIns="0">
+            <a:noAutofit/>
+          </a:bodyPr>
+          <a:lstStyle/>
+          <a:p>
+            <a:pPr algn="r">
+              <a:defRPr sz="1000"/>
+            </a:pPr>
+            <a:fld id="{9F539D8A-04BB-59A5-A67B-202ADEBDFACD}" type="slidenum">
               <a:rPr lang="zh-CN" sz="1000">
                 <a:solidFill>
                   <a:srgbClr val="CFE3D6"/>
@@ -9213,8 +9229,8 @@
         </p:nvSpPr>
         <p:spPr>
           <a:xfrm>
-            <a:off x="609600" y="6477000"/>
-            <a:ext cx="7112000" cy="177800"/>
+            <a:off x="609600" y="6273800"/>
+            <a:ext cx="7112000" cy="203200"/>
           </a:xfrm>
           <a:prstGeom prst="rect">
             <a:avLst/>
@@ -9233,7 +9249,7 @@
               </a:lnSpc>
             </a:pPr>
             <a:r>
-              <a:rPr sz="900" b="0">
+              <a:rPr sz="1000" b="0">
                 <a:solidFill>
                   <a:srgbClr val="5E6E64"/>
                 </a:solidFill>
@@ -9253,7 +9269,7 @@
         </p:nvSpPr>
         <p:spPr>
           <a:xfrm>
-            <a:off x="10820400" y="6451600"/>
+            <a:off x="10820400" y="6248400"/>
             <a:ext cx="762000" cy="203200"/>
           </a:xfrm>
           <a:prstGeom prst="rect">
@@ -9262,13 +9278,15 @@
           <a:noFill/>
         </p:spPr>
         <p:txBody>
-          <a:bodyPr wrap="none" lIns="0" rIns="0" tIns="0" bIns="0">
-            <a:spAutoFit/>
-          </a:bodyPr>
-          <a:lstStyle/>
-          <a:p>
-            <a:pPr algn="r"/>
-            <a:fld id="{B659AC6B-FB3A-4136-B423-8F5805E475E6}" type="slidenum">
+          <a:bodyPr wrap="square" lIns="0" rIns="0" tIns="0" bIns="0">
+            <a:noAutofit/>
+          </a:bodyPr>
+          <a:lstStyle/>
+          <a:p>
+            <a:pPr algn="r">
+              <a:defRPr sz="1000"/>
+            </a:pPr>
+            <a:fld id="{35F7195C-FFDD-5C92-A924-FE88CA374B60}" type="slidenum">
               <a:rPr lang="zh-CN" sz="1000">
                 <a:solidFill>
                   <a:srgbClr val="5E6E64"/>
@@ -9598,8 +9616,8 @@
         </p:nvSpPr>
         <p:spPr>
           <a:xfrm>
-            <a:off x="609600" y="6477000"/>
-            <a:ext cx="7112000" cy="177800"/>
+            <a:off x="609600" y="6273800"/>
+            <a:ext cx="7112000" cy="203200"/>
           </a:xfrm>
           <a:prstGeom prst="rect">
             <a:avLst/>
@@ -9618,7 +9636,7 @@
               </a:lnSpc>
             </a:pPr>
             <a:r>
-              <a:rPr sz="900" b="0">
+              <a:rPr sz="1000" b="0">
                 <a:solidFill>
                   <a:srgbClr val="5E6E64"/>
                 </a:solidFill>
@@ -9638,7 +9656,7 @@
         </p:nvSpPr>
         <p:spPr>
           <a:xfrm>
-            <a:off x="10820400" y="6451600"/>
+            <a:off x="10820400" y="6248400"/>
             <a:ext cx="762000" cy="203200"/>
           </a:xfrm>
           <a:prstGeom prst="rect">
@@ -9647,13 +9665,15 @@
           <a:noFill/>
         </p:spPr>
         <p:txBody>
-          <a:bodyPr wrap="none" lIns="0" rIns="0" tIns="0" bIns="0">
-            <a:spAutoFit/>
-          </a:bodyPr>
-          <a:lstStyle/>
-          <a:p>
-            <a:pPr algn="r"/>
-            <a:fld id="{C44235F6-5078-41C8-9B63-14658D3CAE3B}" type="slidenum">
+          <a:bodyPr wrap="square" lIns="0" rIns="0" tIns="0" bIns="0">
+            <a:noAutofit/>
+          </a:bodyPr>
+          <a:lstStyle/>
+          <a:p>
+            <a:pPr algn="r">
+              <a:defRPr sz="1000"/>
+            </a:pPr>
+            <a:fld id="{B569C87E-0F72-5BAD-9F1B-54B214812A5A}" type="slidenum">
               <a:rPr lang="zh-CN" sz="1000">
                 <a:solidFill>
                   <a:srgbClr val="5E6E64"/>
@@ -10040,8 +10060,8 @@
         </p:nvSpPr>
         <p:spPr>
           <a:xfrm>
-            <a:off x="609600" y="6477000"/>
-            <a:ext cx="7112000" cy="177800"/>
+            <a:off x="609600" y="6273800"/>
+            <a:ext cx="7112000" cy="203200"/>
           </a:xfrm>
           <a:prstGeom prst="rect">
             <a:avLst/>
@@ -10060,7 +10080,7 @@
               </a:lnSpc>
             </a:pPr>
             <a:r>
-              <a:rPr sz="900" b="0">
+              <a:rPr sz="1000" b="0">
                 <a:solidFill>
                   <a:srgbClr val="5E6E64"/>
                 </a:solidFill>
@@ -10080,7 +10100,7 @@
         </p:nvSpPr>
         <p:spPr>
           <a:xfrm>
-            <a:off x="10820400" y="6451600"/>
+            <a:off x="10820400" y="6248400"/>
             <a:ext cx="762000" cy="203200"/>
           </a:xfrm>
           <a:prstGeom prst="rect">
@@ -10089,13 +10109,15 @@
           <a:noFill/>
         </p:spPr>
         <p:txBody>
-          <a:bodyPr wrap="none" lIns="0" rIns="0" tIns="0" bIns="0">
-            <a:spAutoFit/>
-          </a:bodyPr>
-          <a:lstStyle/>
-          <a:p>
-            <a:pPr algn="r"/>
-            <a:fld id="{2E5C2159-334E-4E32-A35B-C918BD14D42A}" type="slidenum">
+          <a:bodyPr wrap="square" lIns="0" rIns="0" tIns="0" bIns="0">
+            <a:noAutofit/>
+          </a:bodyPr>
+          <a:lstStyle/>
+          <a:p>
+            <a:pPr algn="r">
+              <a:defRPr sz="1000"/>
+            </a:pPr>
+            <a:fld id="{3527AE5B-9DEA-5211-96E5-8477444C4ECF}" type="slidenum">
               <a:rPr lang="zh-CN" sz="1000">
                 <a:solidFill>
                   <a:srgbClr val="5E6E64"/>
@@ -10795,8 +10817,8 @@
         </p:nvSpPr>
         <p:spPr>
           <a:xfrm>
-            <a:off x="609600" y="6477000"/>
-            <a:ext cx="7112000" cy="177800"/>
+            <a:off x="609600" y="6273800"/>
+            <a:ext cx="7112000" cy="203200"/>
           </a:xfrm>
           <a:prstGeom prst="rect">
             <a:avLst/>
@@ -10815,7 +10837,7 @@
               </a:lnSpc>
             </a:pPr>
             <a:r>
-              <a:rPr sz="900" b="0">
+              <a:rPr sz="1000" b="0">
                 <a:solidFill>
                   <a:srgbClr val="5E6E64"/>
                 </a:solidFill>
@@ -10835,7 +10857,7 @@
         </p:nvSpPr>
         <p:spPr>
           <a:xfrm>
-            <a:off x="10820400" y="6451600"/>
+            <a:off x="10820400" y="6248400"/>
             <a:ext cx="762000" cy="203200"/>
           </a:xfrm>
           <a:prstGeom prst="rect">
@@ -10844,13 +10866,15 @@
           <a:noFill/>
         </p:spPr>
         <p:txBody>
-          <a:bodyPr wrap="none" lIns="0" rIns="0" tIns="0" bIns="0">
-            <a:spAutoFit/>
-          </a:bodyPr>
-          <a:lstStyle/>
-          <a:p>
-            <a:pPr algn="r"/>
-            <a:fld id="{7428695F-27CC-4FEC-8FA7-C905D4F5D596}" type="slidenum">
+          <a:bodyPr wrap="square" lIns="0" rIns="0" tIns="0" bIns="0">
+            <a:noAutofit/>
+          </a:bodyPr>
+          <a:lstStyle/>
+          <a:p>
+            <a:pPr algn="r">
+              <a:defRPr sz="1000"/>
+            </a:pPr>
+            <a:fld id="{A56E785F-0755-5605-BBB8-76E189280CC7}" type="slidenum">
               <a:rPr lang="zh-CN" sz="1000">
                 <a:solidFill>
                   <a:srgbClr val="5E6E64"/>
@@ -11674,8 +11698,8 @@
         </p:nvSpPr>
         <p:spPr>
           <a:xfrm>
-            <a:off x="609600" y="6477000"/>
-            <a:ext cx="7112000" cy="177800"/>
+            <a:off x="609600" y="6273800"/>
+            <a:ext cx="7112000" cy="203200"/>
           </a:xfrm>
           <a:prstGeom prst="rect">
             <a:avLst/>
@@ -11694,7 +11718,7 @@
               </a:lnSpc>
             </a:pPr>
             <a:r>
-              <a:rPr sz="900" b="0">
+              <a:rPr sz="1000" b="0">
                 <a:solidFill>
                   <a:srgbClr val="5E6E64"/>
                 </a:solidFill>
@@ -11714,7 +11738,7 @@
         </p:nvSpPr>
         <p:spPr>
           <a:xfrm>
-            <a:off x="10820400" y="6451600"/>
+            <a:off x="10820400" y="6248400"/>
             <a:ext cx="762000" cy="203200"/>
           </a:xfrm>
           <a:prstGeom prst="rect">
@@ -11723,13 +11747,15 @@
           <a:noFill/>
         </p:spPr>
         <p:txBody>
-          <a:bodyPr wrap="none" lIns="0" rIns="0" tIns="0" bIns="0">
-            <a:spAutoFit/>
-          </a:bodyPr>
-          <a:lstStyle/>
-          <a:p>
-            <a:pPr algn="r"/>
-            <a:fld id="{85D2D5AB-42E9-4524-B099-5D88AAB8B6A9}" type="slidenum">
+          <a:bodyPr wrap="square" lIns="0" rIns="0" tIns="0" bIns="0">
+            <a:noAutofit/>
+          </a:bodyPr>
+          <a:lstStyle/>
+          <a:p>
+            <a:pPr algn="r">
+              <a:defRPr sz="1000"/>
+            </a:pPr>
+            <a:fld id="{65C339DB-F59C-5AE4-A538-EE26E0364A3E}" type="slidenum">
               <a:rPr lang="zh-CN" sz="1000">
                 <a:solidFill>
                   <a:srgbClr val="5E6E64"/>
@@ -12766,8 +12792,8 @@
         </p:nvSpPr>
         <p:spPr>
           <a:xfrm>
-            <a:off x="609600" y="6477000"/>
-            <a:ext cx="7112000" cy="177800"/>
+            <a:off x="609600" y="6273800"/>
+            <a:ext cx="7112000" cy="203200"/>
           </a:xfrm>
           <a:prstGeom prst="rect">
             <a:avLst/>
@@ -12786,7 +12812,7 @@
               </a:lnSpc>
             </a:pPr>
             <a:r>
-              <a:rPr sz="900" b="0">
+              <a:rPr sz="1000" b="0">
                 <a:solidFill>
                   <a:srgbClr val="5E6E64"/>
                 </a:solidFill>
@@ -12806,7 +12832,7 @@
         </p:nvSpPr>
         <p:spPr>
           <a:xfrm>
-            <a:off x="10820400" y="6451600"/>
+            <a:off x="10820400" y="6248400"/>
             <a:ext cx="762000" cy="203200"/>
           </a:xfrm>
           <a:prstGeom prst="rect">
@@ -12815,13 +12841,15 @@
           <a:noFill/>
         </p:spPr>
         <p:txBody>
-          <a:bodyPr wrap="none" lIns="0" rIns="0" tIns="0" bIns="0">
-            <a:spAutoFit/>
-          </a:bodyPr>
-          <a:lstStyle/>
-          <a:p>
-            <a:pPr algn="r"/>
-            <a:fld id="{3E991970-F3EF-4C8C-BAD3-FCFEB8C9B2E8}" type="slidenum">
+          <a:bodyPr wrap="square" lIns="0" rIns="0" tIns="0" bIns="0">
+            <a:noAutofit/>
+          </a:bodyPr>
+          <a:lstStyle/>
+          <a:p>
+            <a:pPr algn="r">
+              <a:defRPr sz="1000"/>
+            </a:pPr>
+            <a:fld id="{2801DC19-2163-529A-B6BB-7FC7DFFB2DD4}" type="slidenum">
               <a:rPr lang="zh-CN" sz="1000">
                 <a:solidFill>
                   <a:srgbClr val="5E6E64"/>
